--- a/Diagramm/Personalnaya-sreda-dlya-uglublyonnoj-raboty-s-nejrosetevymi-modelyami.pptx
+++ b/Diagramm/Personalnaya-sreda-dlya-uglublyonnoj-raboty-s-nejrosetevymi-modelyami.pptx
@@ -3814,49 +3814,6 @@
           </a:p>
         </p:txBody>
       </p:sp>
-      <p:pic>
-        <p:nvPicPr>
-          <p:cNvPr id="5" name="Рисунок 4">
-            <a:extLst>
-              <a:ext uri="{FF2B5EF4-FFF2-40B4-BE49-F238E27FC236}">
-                <a16:creationId xmlns:a16="http://schemas.microsoft.com/office/drawing/2014/main" id="{1CC1AF3D-8D4E-9C60-EE47-5DC85E337F72}"/>
-              </a:ext>
-            </a:extLst>
-          </p:cNvPr>
-          <p:cNvPicPr>
-            <a:picLocks noChangeAspect="1"/>
-          </p:cNvPicPr>
-          <p:nvPr/>
-        </p:nvPicPr>
-        <p:blipFill>
-          <a:blip r:embed="rId2"/>
-          <a:stretch>
-            <a:fillRect/>
-          </a:stretch>
-        </p:blipFill>
-        <p:spPr>
-          <a:xfrm>
-            <a:off x="4248153" y="645397"/>
-            <a:ext cx="4576705" cy="3852706"/>
-          </a:xfrm>
-          <a:prstGeom prst="roundRect">
-            <a:avLst>
-              <a:gd name="adj" fmla="val 8594"/>
-            </a:avLst>
-          </a:prstGeom>
-          <a:solidFill>
-            <a:srgbClr val="FFFFFF">
-              <a:shade val="85000"/>
-            </a:srgbClr>
-          </a:solidFill>
-          <a:ln>
-            <a:noFill/>
-          </a:ln>
-          <a:effectLst>
-            <a:reflection endPos="0" dist="5000" dir="5400000" sy="-100000" algn="bl" rotWithShape="0"/>
-          </a:effectLst>
-        </p:spPr>
-      </p:pic>
       <p:sp>
         <p:nvSpPr>
           <p:cNvPr id="6" name="TextBox 5">
@@ -3897,6 +3854,60 @@
           </a:p>
         </p:txBody>
       </p:sp>
+      <p:pic>
+        <p:nvPicPr>
+          <p:cNvPr id="4" name="Рисунок 3">
+            <a:extLst>
+              <a:ext uri="{FF2B5EF4-FFF2-40B4-BE49-F238E27FC236}">
+                <a16:creationId xmlns:a16="http://schemas.microsoft.com/office/drawing/2014/main" id="{EBFC2025-E3A5-9D33-C864-59FFFA3ECEBF}"/>
+              </a:ext>
+            </a:extLst>
+          </p:cNvPr>
+          <p:cNvPicPr>
+            <a:picLocks noChangeAspect="1"/>
+          </p:cNvPicPr>
+          <p:nvPr/>
+        </p:nvPicPr>
+        <p:blipFill>
+          <a:blip r:embed="rId2"/>
+          <a:stretch>
+            <a:fillRect/>
+          </a:stretch>
+        </p:blipFill>
+        <p:spPr>
+          <a:xfrm>
+            <a:off x="4120403" y="645397"/>
+            <a:ext cx="4704456" cy="3935933"/>
+          </a:xfrm>
+          <a:prstGeom prst="roundRect">
+            <a:avLst>
+              <a:gd name="adj" fmla="val 16667"/>
+            </a:avLst>
+          </a:prstGeom>
+          <a:ln>
+            <a:noFill/>
+          </a:ln>
+          <a:effectLst>
+            <a:outerShdw blurRad="76200" dist="38100" dir="7800000" algn="tl" rotWithShape="0">
+              <a:srgbClr val="000000">
+                <a:alpha val="40000"/>
+              </a:srgbClr>
+            </a:outerShdw>
+          </a:effectLst>
+          <a:scene3d>
+            <a:camera prst="orthographicFront"/>
+            <a:lightRig rig="contrasting" dir="t">
+              <a:rot lat="0" lon="0" rev="4200000"/>
+            </a:lightRig>
+          </a:scene3d>
+          <a:sp3d prstMaterial="plastic">
+            <a:bevelT w="381000" h="114300" prst="relaxedInset"/>
+            <a:contourClr>
+              <a:srgbClr val="969696"/>
+            </a:contourClr>
+          </a:sp3d>
+        </p:spPr>
+      </p:pic>
     </p:spTree>
     <p:extLst>
       <p:ext uri="{BB962C8B-B14F-4D97-AF65-F5344CB8AC3E}">
@@ -4989,8 +5000,8 @@
         </p:nvSpPr>
         <p:spPr>
           <a:xfrm>
-            <a:off x="4749701" y="2399630"/>
-            <a:ext cx="3902943" cy="1460004"/>
+            <a:off x="4749701" y="2399629"/>
+            <a:ext cx="3902943" cy="2388757"/>
           </a:xfrm>
           <a:prstGeom prst="rect">
             <a:avLst/>
@@ -5033,6 +5044,17 @@
               <a:buChar char="•"/>
             </a:pPr>
             <a:r>
+              <a:rPr lang="ru-RU" sz="1100" dirty="0">
+                <a:solidFill>
+                  <a:srgbClr val="D4D4D1"/>
+                </a:solidFill>
+                <a:latin typeface="Roboto" pitchFamily="34" charset="0"/>
+                <a:ea typeface="Roboto" pitchFamily="34" charset="-122"/>
+                <a:cs typeface="Roboto" pitchFamily="34" charset="-120"/>
+              </a:rPr>
+              <a:t>Поиск</a:t>
+            </a:r>
+            <a:r>
               <a:rPr lang="en-US" sz="1100" dirty="0">
                 <a:solidFill>
                   <a:srgbClr val="D4D4D1"/>
@@ -5041,9 +5063,19 @@
                 <a:ea typeface="Roboto" pitchFamily="34" charset="-122"/>
                 <a:cs typeface="Roboto" pitchFamily="34" charset="-120"/>
               </a:rPr>
-              <a:t>Улучшение интерфейса: переименование/удаление чатов, поиск, Markdown</a:t>
-            </a:r>
-            <a:endParaRPr lang="en-US" sz="1100" dirty="0"/>
+              <a:t> </a:t>
+            </a:r>
+            <a:r>
+              <a:rPr lang="ru-RU" sz="1100" dirty="0">
+                <a:solidFill>
+                  <a:srgbClr val="D4D4D1"/>
+                </a:solidFill>
+                <a:latin typeface="Roboto" pitchFamily="34" charset="0"/>
+                <a:ea typeface="Roboto" pitchFamily="34" charset="-122"/>
+                <a:cs typeface="Roboto" pitchFamily="34" charset="-120"/>
+              </a:rPr>
+              <a:t>сообщений и чатов</a:t>
+            </a:r>
           </a:p>
           <a:p>
             <a:pPr marL="223520" indent="-223520" algn="l">
@@ -5062,7 +5094,85 @@
                 <a:ea typeface="Roboto" pitchFamily="34" charset="-122"/>
                 <a:cs typeface="Roboto" pitchFamily="34" charset="-120"/>
               </a:rPr>
-              <a:t>Расширение функционала закрепленных сообщений, возможность «выключить» сообщения, возможность копирования содержимого сообщений.</a:t>
+              <a:t>Использование текста в закрепленных сообщениях в новом </a:t>
+            </a:r>
+            <a:r>
+              <a:rPr lang="ru-RU" sz="1100" dirty="0" err="1">
+                <a:solidFill>
+                  <a:srgbClr val="D4D4D1"/>
+                </a:solidFill>
+                <a:latin typeface="Roboto" pitchFamily="34" charset="0"/>
+                <a:ea typeface="Roboto" pitchFamily="34" charset="-122"/>
+                <a:cs typeface="Roboto" pitchFamily="34" charset="-120"/>
+              </a:rPr>
+              <a:t>промпте</a:t>
+            </a:r>
+            <a:endParaRPr lang="ru-RU" sz="1100" dirty="0">
+              <a:solidFill>
+                <a:srgbClr val="D4D4D1"/>
+              </a:solidFill>
+              <a:latin typeface="Roboto" pitchFamily="34" charset="0"/>
+              <a:ea typeface="Roboto" pitchFamily="34" charset="-122"/>
+              <a:cs typeface="Roboto" pitchFamily="34" charset="-120"/>
+            </a:endParaRPr>
+          </a:p>
+          <a:p>
+            <a:pPr marL="223520" indent="-223520" algn="l">
+              <a:lnSpc>
+                <a:spcPct val="133000"/>
+              </a:lnSpc>
+              <a:buSzPct val="100000"/>
+              <a:buChar char="•"/>
+            </a:pPr>
+            <a:r>
+              <a:rPr lang="ru-RU" sz="1100" dirty="0">
+                <a:solidFill>
+                  <a:srgbClr val="D4D4D1"/>
+                </a:solidFill>
+                <a:latin typeface="Roboto" pitchFamily="34" charset="0"/>
+                <a:ea typeface="Roboto" pitchFamily="34" charset="-122"/>
+                <a:cs typeface="Roboto" pitchFamily="34" charset="-120"/>
+              </a:rPr>
+              <a:t>возможность отправлять изображения, диктовать </a:t>
+            </a:r>
+            <a:r>
+              <a:rPr lang="ru-RU" sz="1100" dirty="0" err="1">
+                <a:solidFill>
+                  <a:srgbClr val="D4D4D1"/>
+                </a:solidFill>
+                <a:latin typeface="Roboto" pitchFamily="34" charset="0"/>
+                <a:ea typeface="Roboto" pitchFamily="34" charset="-122"/>
+                <a:cs typeface="Roboto" pitchFamily="34" charset="-120"/>
+              </a:rPr>
+              <a:t>промпт</a:t>
+            </a:r>
+            <a:endParaRPr lang="ru-RU" sz="1100" dirty="0">
+              <a:solidFill>
+                <a:srgbClr val="D4D4D1"/>
+              </a:solidFill>
+              <a:latin typeface="Roboto" pitchFamily="34" charset="0"/>
+              <a:ea typeface="Roboto" pitchFamily="34" charset="-122"/>
+              <a:cs typeface="Roboto" pitchFamily="34" charset="-120"/>
+            </a:endParaRPr>
+          </a:p>
+          <a:p>
+            <a:pPr marL="223520" indent="-223520" algn="l">
+              <a:lnSpc>
+                <a:spcPct val="133000"/>
+              </a:lnSpc>
+              <a:buSzPct val="100000"/>
+              <a:buChar char="•"/>
+            </a:pPr>
+            <a:r>
+              <a:rPr lang="ru-RU" sz="1100" dirty="0">
+                <a:solidFill>
+                  <a:srgbClr val="D4D4D1"/>
+                </a:solidFill>
+                <a:latin typeface="Roboto" pitchFamily="34" charset="0"/>
+                <a:ea typeface="Roboto" pitchFamily="34" charset="-122"/>
+                <a:cs typeface="Roboto" pitchFamily="34" charset="-120"/>
+              </a:rPr>
+              <a:t>Комментарии к версиям и сообщениям</a:t>
             </a:r>
             <a:endParaRPr lang="en-US" sz="1100" dirty="0"/>
           </a:p>
